--- a/IV Sem/Linux/Linux Basics.pptx
+++ b/IV Sem/Linux/Linux Basics.pptx
@@ -9,6 +9,10 @@
     <p:sldId id="257" r:id="rId3"/>
     <p:sldId id="258" r:id="rId4"/>
     <p:sldId id="259" r:id="rId5"/>
+    <p:sldId id="260" r:id="rId6"/>
+    <p:sldId id="261" r:id="rId7"/>
+    <p:sldId id="262" r:id="rId8"/>
+    <p:sldId id="263" r:id="rId9"/>
   </p:sldIdLst>
   <p:sldSz cx="12192000" cy="6858000"/>
   <p:notesSz cx="6858000" cy="9144000"/>
@@ -107,7 +111,86 @@
       </a:defRPr>
     </a:lvl9pPr>
   </p:defaultTextStyle>
+  <p:extLst>
+    <p:ext uri="{EFAFB233-063F-42B5-8137-9DF3F51BA10A}">
+      <p15:sldGuideLst xmlns:p15="http://schemas.microsoft.com/office/powerpoint/2012/main"/>
+    </p:ext>
+  </p:extLst>
 </p:presentation>
+</file>
+
+<file path=ppt/changesInfos/changesInfo1.xml><?xml version="1.0" encoding="utf-8"?>
+<pc:chgInfo xmlns:a="http://schemas.openxmlformats.org/drawingml/2006/main" xmlns:r="http://schemas.openxmlformats.org/officeDocument/2006/relationships" xmlns:ac="http://schemas.microsoft.com/office/drawing/2013/main/command" xmlns:pc="http://schemas.microsoft.com/office/powerpoint/2013/main/command">
+  <pc:docChgLst>
+    <pc:chgData name="Utkarsh Agarwal" userId="7a1216fa42ee05d0" providerId="LiveId" clId="{5A8ABE04-300D-46CD-9942-40B59078845C}"/>
+    <pc:docChg chg="addSld modSld">
+      <pc:chgData name="Utkarsh Agarwal" userId="7a1216fa42ee05d0" providerId="LiveId" clId="{5A8ABE04-300D-46CD-9942-40B59078845C}" dt="2026-01-25T16:02:03.510" v="10" actId="22"/>
+      <pc:docMkLst>
+        <pc:docMk/>
+      </pc:docMkLst>
+      <pc:sldChg chg="addSp new mod">
+        <pc:chgData name="Utkarsh Agarwal" userId="7a1216fa42ee05d0" providerId="LiveId" clId="{5A8ABE04-300D-46CD-9942-40B59078845C}" dt="2026-01-25T15:29:33.750" v="1" actId="22"/>
+        <pc:sldMkLst>
+          <pc:docMk/>
+          <pc:sldMk cId="3117920082" sldId="260"/>
+        </pc:sldMkLst>
+        <pc:picChg chg="add">
+          <ac:chgData name="Utkarsh Agarwal" userId="7a1216fa42ee05d0" providerId="LiveId" clId="{5A8ABE04-300D-46CD-9942-40B59078845C}" dt="2026-01-25T15:29:33.750" v="1" actId="22"/>
+          <ac:picMkLst>
+            <pc:docMk/>
+            <pc:sldMk cId="3117920082" sldId="260"/>
+            <ac:picMk id="5" creationId="{34899A6A-C4FE-31C5-5709-23380842FB4A}"/>
+          </ac:picMkLst>
+        </pc:picChg>
+      </pc:sldChg>
+      <pc:sldChg chg="addSp new mod">
+        <pc:chgData name="Utkarsh Agarwal" userId="7a1216fa42ee05d0" providerId="LiveId" clId="{5A8ABE04-300D-46CD-9942-40B59078845C}" dt="2026-01-25T15:45:31.370" v="3" actId="22"/>
+        <pc:sldMkLst>
+          <pc:docMk/>
+          <pc:sldMk cId="1797943195" sldId="261"/>
+        </pc:sldMkLst>
+        <pc:picChg chg="add">
+          <ac:chgData name="Utkarsh Agarwal" userId="7a1216fa42ee05d0" providerId="LiveId" clId="{5A8ABE04-300D-46CD-9942-40B59078845C}" dt="2026-01-25T15:45:31.370" v="3" actId="22"/>
+          <ac:picMkLst>
+            <pc:docMk/>
+            <pc:sldMk cId="1797943195" sldId="261"/>
+            <ac:picMk id="5" creationId="{9CE6321A-7F3F-8FD1-F63E-B9FE7800F5A6}"/>
+          </ac:picMkLst>
+        </pc:picChg>
+      </pc:sldChg>
+      <pc:sldChg chg="addSp modSp new mod">
+        <pc:chgData name="Utkarsh Agarwal" userId="7a1216fa42ee05d0" providerId="LiveId" clId="{5A8ABE04-300D-46CD-9942-40B59078845C}" dt="2026-01-25T15:54:41.293" v="8" actId="1076"/>
+        <pc:sldMkLst>
+          <pc:docMk/>
+          <pc:sldMk cId="2253514919" sldId="262"/>
+        </pc:sldMkLst>
+        <pc:picChg chg="add mod">
+          <ac:chgData name="Utkarsh Agarwal" userId="7a1216fa42ee05d0" providerId="LiveId" clId="{5A8ABE04-300D-46CD-9942-40B59078845C}" dt="2026-01-25T15:54:41.293" v="8" actId="1076"/>
+          <ac:picMkLst>
+            <pc:docMk/>
+            <pc:sldMk cId="2253514919" sldId="262"/>
+            <ac:picMk id="5" creationId="{FB47E0A8-BAF1-48A6-9922-89C68E7EEDC4}"/>
+          </ac:picMkLst>
+        </pc:picChg>
+      </pc:sldChg>
+      <pc:sldChg chg="addSp new mod">
+        <pc:chgData name="Utkarsh Agarwal" userId="7a1216fa42ee05d0" providerId="LiveId" clId="{5A8ABE04-300D-46CD-9942-40B59078845C}" dt="2026-01-25T16:02:03.510" v="10" actId="22"/>
+        <pc:sldMkLst>
+          <pc:docMk/>
+          <pc:sldMk cId="701625787" sldId="263"/>
+        </pc:sldMkLst>
+        <pc:picChg chg="add">
+          <ac:chgData name="Utkarsh Agarwal" userId="7a1216fa42ee05d0" providerId="LiveId" clId="{5A8ABE04-300D-46CD-9942-40B59078845C}" dt="2026-01-25T16:02:03.510" v="10" actId="22"/>
+          <ac:picMkLst>
+            <pc:docMk/>
+            <pc:sldMk cId="701625787" sldId="263"/>
+            <ac:picMk id="5" creationId="{D0F4D67D-14F3-F3B4-BAE7-6443D7B1D2DB}"/>
+          </ac:picMkLst>
+        </pc:picChg>
+      </pc:sldChg>
+    </pc:docChg>
+  </pc:docChgLst>
+</pc:chgInfo>
 </file>
 
 <file path=ppt/slideLayouts/slideLayout1.xml><?xml version="1.0" encoding="utf-8"?>
@@ -259,7 +342,7 @@
           <a:p>
             <a:fld id="{2F3303C3-2CD8-4332-90AE-4FB0E3E6FE25}" type="datetimeFigureOut">
               <a:rPr lang="en-IN" smtClean="0"/>
-              <a:t>19-01-2026</a:t>
+              <a:t>25-01-2026</a:t>
             </a:fld>
             <a:endParaRPr lang="en-IN"/>
           </a:p>
@@ -459,7 +542,7 @@
           <a:p>
             <a:fld id="{2F3303C3-2CD8-4332-90AE-4FB0E3E6FE25}" type="datetimeFigureOut">
               <a:rPr lang="en-IN" smtClean="0"/>
-              <a:t>19-01-2026</a:t>
+              <a:t>25-01-2026</a:t>
             </a:fld>
             <a:endParaRPr lang="en-IN"/>
           </a:p>
@@ -669,7 +752,7 @@
           <a:p>
             <a:fld id="{2F3303C3-2CD8-4332-90AE-4FB0E3E6FE25}" type="datetimeFigureOut">
               <a:rPr lang="en-IN" smtClean="0"/>
-              <a:t>19-01-2026</a:t>
+              <a:t>25-01-2026</a:t>
             </a:fld>
             <a:endParaRPr lang="en-IN"/>
           </a:p>
@@ -869,7 +952,7 @@
           <a:p>
             <a:fld id="{2F3303C3-2CD8-4332-90AE-4FB0E3E6FE25}" type="datetimeFigureOut">
               <a:rPr lang="en-IN" smtClean="0"/>
-              <a:t>19-01-2026</a:t>
+              <a:t>25-01-2026</a:t>
             </a:fld>
             <a:endParaRPr lang="en-IN"/>
           </a:p>
@@ -1145,7 +1228,7 @@
           <a:p>
             <a:fld id="{2F3303C3-2CD8-4332-90AE-4FB0E3E6FE25}" type="datetimeFigureOut">
               <a:rPr lang="en-IN" smtClean="0"/>
-              <a:t>19-01-2026</a:t>
+              <a:t>25-01-2026</a:t>
             </a:fld>
             <a:endParaRPr lang="en-IN"/>
           </a:p>
@@ -1413,7 +1496,7 @@
           <a:p>
             <a:fld id="{2F3303C3-2CD8-4332-90AE-4FB0E3E6FE25}" type="datetimeFigureOut">
               <a:rPr lang="en-IN" smtClean="0"/>
-              <a:t>19-01-2026</a:t>
+              <a:t>25-01-2026</a:t>
             </a:fld>
             <a:endParaRPr lang="en-IN"/>
           </a:p>
@@ -1828,7 +1911,7 @@
           <a:p>
             <a:fld id="{2F3303C3-2CD8-4332-90AE-4FB0E3E6FE25}" type="datetimeFigureOut">
               <a:rPr lang="en-IN" smtClean="0"/>
-              <a:t>19-01-2026</a:t>
+              <a:t>25-01-2026</a:t>
             </a:fld>
             <a:endParaRPr lang="en-IN"/>
           </a:p>
@@ -1970,7 +2053,7 @@
           <a:p>
             <a:fld id="{2F3303C3-2CD8-4332-90AE-4FB0E3E6FE25}" type="datetimeFigureOut">
               <a:rPr lang="en-IN" smtClean="0"/>
-              <a:t>19-01-2026</a:t>
+              <a:t>25-01-2026</a:t>
             </a:fld>
             <a:endParaRPr lang="en-IN"/>
           </a:p>
@@ -2083,7 +2166,7 @@
           <a:p>
             <a:fld id="{2F3303C3-2CD8-4332-90AE-4FB0E3E6FE25}" type="datetimeFigureOut">
               <a:rPr lang="en-IN" smtClean="0"/>
-              <a:t>19-01-2026</a:t>
+              <a:t>25-01-2026</a:t>
             </a:fld>
             <a:endParaRPr lang="en-IN"/>
           </a:p>
@@ -2396,7 +2479,7 @@
           <a:p>
             <a:fld id="{2F3303C3-2CD8-4332-90AE-4FB0E3E6FE25}" type="datetimeFigureOut">
               <a:rPr lang="en-IN" smtClean="0"/>
-              <a:t>19-01-2026</a:t>
+              <a:t>25-01-2026</a:t>
             </a:fld>
             <a:endParaRPr lang="en-IN"/>
           </a:p>
@@ -2685,7 +2768,7 @@
           <a:p>
             <a:fld id="{2F3303C3-2CD8-4332-90AE-4FB0E3E6FE25}" type="datetimeFigureOut">
               <a:rPr lang="en-IN" smtClean="0"/>
-              <a:t>19-01-2026</a:t>
+              <a:t>25-01-2026</a:t>
             </a:fld>
             <a:endParaRPr lang="en-IN"/>
           </a:p>
@@ -2928,7 +3011,7 @@
           <a:p>
             <a:fld id="{2F3303C3-2CD8-4332-90AE-4FB0E3E6FE25}" type="datetimeFigureOut">
               <a:rPr lang="en-IN" smtClean="0"/>
-              <a:t>19-01-2026</a:t>
+              <a:t>25-01-2026</a:t>
             </a:fld>
             <a:endParaRPr lang="en-IN"/>
           </a:p>
@@ -3759,6 +3842,446 @@
     <p:extLst>
       <p:ext uri="{BB962C8B-B14F-4D97-AF65-F5344CB8AC3E}">
         <p14:creationId xmlns:p14="http://schemas.microsoft.com/office/powerpoint/2010/main" val="3357613579"/>
+      </p:ext>
+    </p:extLst>
+  </p:cSld>
+  <p:clrMapOvr>
+    <a:masterClrMapping/>
+  </p:clrMapOvr>
+</p:sld>
+</file>
+
+<file path=ppt/slides/slide5.xml><?xml version="1.0" encoding="utf-8"?>
+<p:sld xmlns:a="http://schemas.openxmlformats.org/drawingml/2006/main" xmlns:r="http://schemas.openxmlformats.org/officeDocument/2006/relationships" xmlns:p="http://schemas.openxmlformats.org/presentationml/2006/main">
+  <p:cSld>
+    <p:spTree>
+      <p:nvGrpSpPr>
+        <p:cNvPr id="1" name=""/>
+        <p:cNvGrpSpPr/>
+        <p:nvPr/>
+      </p:nvGrpSpPr>
+      <p:grpSpPr>
+        <a:xfrm>
+          <a:off x="0" y="0"/>
+          <a:ext cx="0" cy="0"/>
+          <a:chOff x="0" y="0"/>
+          <a:chExt cx="0" cy="0"/>
+        </a:xfrm>
+      </p:grpSpPr>
+      <p:sp>
+        <p:nvSpPr>
+          <p:cNvPr id="2" name="Title 1">
+            <a:extLst>
+              <a:ext uri="{FF2B5EF4-FFF2-40B4-BE49-F238E27FC236}">
+                <a16:creationId xmlns:a16="http://schemas.microsoft.com/office/drawing/2014/main" id="{6614FD10-C522-0C1F-1C07-3F7D9173E480}"/>
+              </a:ext>
+            </a:extLst>
+          </p:cNvPr>
+          <p:cNvSpPr>
+            <a:spLocks noGrp="1"/>
+          </p:cNvSpPr>
+          <p:nvPr>
+            <p:ph type="title"/>
+          </p:nvPr>
+        </p:nvSpPr>
+        <p:spPr/>
+        <p:txBody>
+          <a:bodyPr/>
+          <a:lstStyle/>
+          <a:p>
+            <a:endParaRPr lang="en-IN"/>
+          </a:p>
+        </p:txBody>
+      </p:sp>
+      <p:sp>
+        <p:nvSpPr>
+          <p:cNvPr id="3" name="Content Placeholder 2">
+            <a:extLst>
+              <a:ext uri="{FF2B5EF4-FFF2-40B4-BE49-F238E27FC236}">
+                <a16:creationId xmlns:a16="http://schemas.microsoft.com/office/drawing/2014/main" id="{E0112E01-BD58-86BC-7D16-FBD07F9F1CF0}"/>
+              </a:ext>
+            </a:extLst>
+          </p:cNvPr>
+          <p:cNvSpPr>
+            <a:spLocks noGrp="1"/>
+          </p:cNvSpPr>
+          <p:nvPr>
+            <p:ph idx="1"/>
+          </p:nvPr>
+        </p:nvSpPr>
+        <p:spPr/>
+        <p:txBody>
+          <a:bodyPr/>
+          <a:lstStyle/>
+          <a:p>
+            <a:endParaRPr lang="en-IN"/>
+          </a:p>
+        </p:txBody>
+      </p:sp>
+      <p:pic>
+        <p:nvPicPr>
+          <p:cNvPr id="5" name="Picture 4">
+            <a:extLst>
+              <a:ext uri="{FF2B5EF4-FFF2-40B4-BE49-F238E27FC236}">
+                <a16:creationId xmlns:a16="http://schemas.microsoft.com/office/drawing/2014/main" id="{34899A6A-C4FE-31C5-5709-23380842FB4A}"/>
+              </a:ext>
+            </a:extLst>
+          </p:cNvPr>
+          <p:cNvPicPr>
+            <a:picLocks noChangeAspect="1"/>
+          </p:cNvPicPr>
+          <p:nvPr/>
+        </p:nvPicPr>
+        <p:blipFill>
+          <a:blip r:embed="rId2"/>
+          <a:stretch>
+            <a:fillRect/>
+          </a:stretch>
+        </p:blipFill>
+        <p:spPr>
+          <a:xfrm>
+            <a:off x="1011620" y="0"/>
+            <a:ext cx="10168759" cy="6858000"/>
+          </a:xfrm>
+          <a:prstGeom prst="rect">
+            <a:avLst/>
+          </a:prstGeom>
+        </p:spPr>
+      </p:pic>
+    </p:spTree>
+    <p:extLst>
+      <p:ext uri="{BB962C8B-B14F-4D97-AF65-F5344CB8AC3E}">
+        <p14:creationId xmlns:p14="http://schemas.microsoft.com/office/powerpoint/2010/main" val="3117920082"/>
+      </p:ext>
+    </p:extLst>
+  </p:cSld>
+  <p:clrMapOvr>
+    <a:masterClrMapping/>
+  </p:clrMapOvr>
+</p:sld>
+</file>
+
+<file path=ppt/slides/slide6.xml><?xml version="1.0" encoding="utf-8"?>
+<p:sld xmlns:a="http://schemas.openxmlformats.org/drawingml/2006/main" xmlns:r="http://schemas.openxmlformats.org/officeDocument/2006/relationships" xmlns:p="http://schemas.openxmlformats.org/presentationml/2006/main">
+  <p:cSld>
+    <p:spTree>
+      <p:nvGrpSpPr>
+        <p:cNvPr id="1" name=""/>
+        <p:cNvGrpSpPr/>
+        <p:nvPr/>
+      </p:nvGrpSpPr>
+      <p:grpSpPr>
+        <a:xfrm>
+          <a:off x="0" y="0"/>
+          <a:ext cx="0" cy="0"/>
+          <a:chOff x="0" y="0"/>
+          <a:chExt cx="0" cy="0"/>
+        </a:xfrm>
+      </p:grpSpPr>
+      <p:sp>
+        <p:nvSpPr>
+          <p:cNvPr id="2" name="Title 1">
+            <a:extLst>
+              <a:ext uri="{FF2B5EF4-FFF2-40B4-BE49-F238E27FC236}">
+                <a16:creationId xmlns:a16="http://schemas.microsoft.com/office/drawing/2014/main" id="{84A2BC83-B275-3221-0394-3326A58DB587}"/>
+              </a:ext>
+            </a:extLst>
+          </p:cNvPr>
+          <p:cNvSpPr>
+            <a:spLocks noGrp="1"/>
+          </p:cNvSpPr>
+          <p:nvPr>
+            <p:ph type="title"/>
+          </p:nvPr>
+        </p:nvSpPr>
+        <p:spPr/>
+        <p:txBody>
+          <a:bodyPr/>
+          <a:lstStyle/>
+          <a:p>
+            <a:endParaRPr lang="en-IN"/>
+          </a:p>
+        </p:txBody>
+      </p:sp>
+      <p:sp>
+        <p:nvSpPr>
+          <p:cNvPr id="3" name="Content Placeholder 2">
+            <a:extLst>
+              <a:ext uri="{FF2B5EF4-FFF2-40B4-BE49-F238E27FC236}">
+                <a16:creationId xmlns:a16="http://schemas.microsoft.com/office/drawing/2014/main" id="{997372D7-EBAE-A1F8-0B38-9225D62FAAC1}"/>
+              </a:ext>
+            </a:extLst>
+          </p:cNvPr>
+          <p:cNvSpPr>
+            <a:spLocks noGrp="1"/>
+          </p:cNvSpPr>
+          <p:nvPr>
+            <p:ph idx="1"/>
+          </p:nvPr>
+        </p:nvSpPr>
+        <p:spPr/>
+        <p:txBody>
+          <a:bodyPr/>
+          <a:lstStyle/>
+          <a:p>
+            <a:endParaRPr lang="en-IN"/>
+          </a:p>
+        </p:txBody>
+      </p:sp>
+      <p:pic>
+        <p:nvPicPr>
+          <p:cNvPr id="5" name="Picture 4">
+            <a:extLst>
+              <a:ext uri="{FF2B5EF4-FFF2-40B4-BE49-F238E27FC236}">
+                <a16:creationId xmlns:a16="http://schemas.microsoft.com/office/drawing/2014/main" id="{9CE6321A-7F3F-8FD1-F63E-B9FE7800F5A6}"/>
+              </a:ext>
+            </a:extLst>
+          </p:cNvPr>
+          <p:cNvPicPr>
+            <a:picLocks noChangeAspect="1"/>
+          </p:cNvPicPr>
+          <p:nvPr/>
+        </p:nvPicPr>
+        <p:blipFill>
+          <a:blip r:embed="rId2"/>
+          <a:stretch>
+            <a:fillRect/>
+          </a:stretch>
+        </p:blipFill>
+        <p:spPr>
+          <a:xfrm>
+            <a:off x="1211050" y="0"/>
+            <a:ext cx="9769900" cy="6858000"/>
+          </a:xfrm>
+          <a:prstGeom prst="rect">
+            <a:avLst/>
+          </a:prstGeom>
+        </p:spPr>
+      </p:pic>
+    </p:spTree>
+    <p:extLst>
+      <p:ext uri="{BB962C8B-B14F-4D97-AF65-F5344CB8AC3E}">
+        <p14:creationId xmlns:p14="http://schemas.microsoft.com/office/powerpoint/2010/main" val="1797943195"/>
+      </p:ext>
+    </p:extLst>
+  </p:cSld>
+  <p:clrMapOvr>
+    <a:masterClrMapping/>
+  </p:clrMapOvr>
+</p:sld>
+</file>
+
+<file path=ppt/slides/slide7.xml><?xml version="1.0" encoding="utf-8"?>
+<p:sld xmlns:a="http://schemas.openxmlformats.org/drawingml/2006/main" xmlns:r="http://schemas.openxmlformats.org/officeDocument/2006/relationships" xmlns:p="http://schemas.openxmlformats.org/presentationml/2006/main">
+  <p:cSld>
+    <p:spTree>
+      <p:nvGrpSpPr>
+        <p:cNvPr id="1" name=""/>
+        <p:cNvGrpSpPr/>
+        <p:nvPr/>
+      </p:nvGrpSpPr>
+      <p:grpSpPr>
+        <a:xfrm>
+          <a:off x="0" y="0"/>
+          <a:ext cx="0" cy="0"/>
+          <a:chOff x="0" y="0"/>
+          <a:chExt cx="0" cy="0"/>
+        </a:xfrm>
+      </p:grpSpPr>
+      <p:sp>
+        <p:nvSpPr>
+          <p:cNvPr id="2" name="Title 1">
+            <a:extLst>
+              <a:ext uri="{FF2B5EF4-FFF2-40B4-BE49-F238E27FC236}">
+                <a16:creationId xmlns:a16="http://schemas.microsoft.com/office/drawing/2014/main" id="{05DE106A-BB1E-7D35-6800-3DF8A2EF9B92}"/>
+              </a:ext>
+            </a:extLst>
+          </p:cNvPr>
+          <p:cNvSpPr>
+            <a:spLocks noGrp="1"/>
+          </p:cNvSpPr>
+          <p:nvPr>
+            <p:ph type="title"/>
+          </p:nvPr>
+        </p:nvSpPr>
+        <p:spPr/>
+        <p:txBody>
+          <a:bodyPr/>
+          <a:lstStyle/>
+          <a:p>
+            <a:endParaRPr lang="en-IN"/>
+          </a:p>
+        </p:txBody>
+      </p:sp>
+      <p:sp>
+        <p:nvSpPr>
+          <p:cNvPr id="3" name="Content Placeholder 2">
+            <a:extLst>
+              <a:ext uri="{FF2B5EF4-FFF2-40B4-BE49-F238E27FC236}">
+                <a16:creationId xmlns:a16="http://schemas.microsoft.com/office/drawing/2014/main" id="{ED5256EB-3250-6641-1B60-BE6ADC67968E}"/>
+              </a:ext>
+            </a:extLst>
+          </p:cNvPr>
+          <p:cNvSpPr>
+            <a:spLocks noGrp="1"/>
+          </p:cNvSpPr>
+          <p:nvPr>
+            <p:ph idx="1"/>
+          </p:nvPr>
+        </p:nvSpPr>
+        <p:spPr/>
+        <p:txBody>
+          <a:bodyPr/>
+          <a:lstStyle/>
+          <a:p>
+            <a:endParaRPr lang="en-IN"/>
+          </a:p>
+        </p:txBody>
+      </p:sp>
+      <p:pic>
+        <p:nvPicPr>
+          <p:cNvPr id="5" name="Picture 4">
+            <a:extLst>
+              <a:ext uri="{FF2B5EF4-FFF2-40B4-BE49-F238E27FC236}">
+                <a16:creationId xmlns:a16="http://schemas.microsoft.com/office/drawing/2014/main" id="{FB47E0A8-BAF1-48A6-9922-89C68E7EEDC4}"/>
+              </a:ext>
+            </a:extLst>
+          </p:cNvPr>
+          <p:cNvPicPr>
+            <a:picLocks noChangeAspect="1"/>
+          </p:cNvPicPr>
+          <p:nvPr/>
+        </p:nvPicPr>
+        <p:blipFill>
+          <a:blip r:embed="rId2"/>
+          <a:stretch>
+            <a:fillRect/>
+          </a:stretch>
+        </p:blipFill>
+        <p:spPr>
+          <a:xfrm>
+            <a:off x="1526785" y="146581"/>
+            <a:ext cx="9138430" cy="6564838"/>
+          </a:xfrm>
+          <a:prstGeom prst="rect">
+            <a:avLst/>
+          </a:prstGeom>
+        </p:spPr>
+      </p:pic>
+    </p:spTree>
+    <p:extLst>
+      <p:ext uri="{BB962C8B-B14F-4D97-AF65-F5344CB8AC3E}">
+        <p14:creationId xmlns:p14="http://schemas.microsoft.com/office/powerpoint/2010/main" val="2253514919"/>
+      </p:ext>
+    </p:extLst>
+  </p:cSld>
+  <p:clrMapOvr>
+    <a:masterClrMapping/>
+  </p:clrMapOvr>
+</p:sld>
+</file>
+
+<file path=ppt/slides/slide8.xml><?xml version="1.0" encoding="utf-8"?>
+<p:sld xmlns:a="http://schemas.openxmlformats.org/drawingml/2006/main" xmlns:r="http://schemas.openxmlformats.org/officeDocument/2006/relationships" xmlns:p="http://schemas.openxmlformats.org/presentationml/2006/main">
+  <p:cSld>
+    <p:spTree>
+      <p:nvGrpSpPr>
+        <p:cNvPr id="1" name=""/>
+        <p:cNvGrpSpPr/>
+        <p:nvPr/>
+      </p:nvGrpSpPr>
+      <p:grpSpPr>
+        <a:xfrm>
+          <a:off x="0" y="0"/>
+          <a:ext cx="0" cy="0"/>
+          <a:chOff x="0" y="0"/>
+          <a:chExt cx="0" cy="0"/>
+        </a:xfrm>
+      </p:grpSpPr>
+      <p:sp>
+        <p:nvSpPr>
+          <p:cNvPr id="2" name="Title 1">
+            <a:extLst>
+              <a:ext uri="{FF2B5EF4-FFF2-40B4-BE49-F238E27FC236}">
+                <a16:creationId xmlns:a16="http://schemas.microsoft.com/office/drawing/2014/main" id="{9F371999-2EEE-9CC5-AE47-ED41A3459C40}"/>
+              </a:ext>
+            </a:extLst>
+          </p:cNvPr>
+          <p:cNvSpPr>
+            <a:spLocks noGrp="1"/>
+          </p:cNvSpPr>
+          <p:nvPr>
+            <p:ph type="title"/>
+          </p:nvPr>
+        </p:nvSpPr>
+        <p:spPr/>
+        <p:txBody>
+          <a:bodyPr/>
+          <a:lstStyle/>
+          <a:p>
+            <a:endParaRPr lang="en-IN"/>
+          </a:p>
+        </p:txBody>
+      </p:sp>
+      <p:sp>
+        <p:nvSpPr>
+          <p:cNvPr id="3" name="Content Placeholder 2">
+            <a:extLst>
+              <a:ext uri="{FF2B5EF4-FFF2-40B4-BE49-F238E27FC236}">
+                <a16:creationId xmlns:a16="http://schemas.microsoft.com/office/drawing/2014/main" id="{A5EB5153-494B-FE2C-37EE-807668219ABF}"/>
+              </a:ext>
+            </a:extLst>
+          </p:cNvPr>
+          <p:cNvSpPr>
+            <a:spLocks noGrp="1"/>
+          </p:cNvSpPr>
+          <p:nvPr>
+            <p:ph idx="1"/>
+          </p:nvPr>
+        </p:nvSpPr>
+        <p:spPr/>
+        <p:txBody>
+          <a:bodyPr/>
+          <a:lstStyle/>
+          <a:p>
+            <a:endParaRPr lang="en-IN"/>
+          </a:p>
+        </p:txBody>
+      </p:sp>
+      <p:pic>
+        <p:nvPicPr>
+          <p:cNvPr id="5" name="Picture 4">
+            <a:extLst>
+              <a:ext uri="{FF2B5EF4-FFF2-40B4-BE49-F238E27FC236}">
+                <a16:creationId xmlns:a16="http://schemas.microsoft.com/office/drawing/2014/main" id="{D0F4D67D-14F3-F3B4-BAE7-6443D7B1D2DB}"/>
+              </a:ext>
+            </a:extLst>
+          </p:cNvPr>
+          <p:cNvPicPr>
+            <a:picLocks noChangeAspect="1"/>
+          </p:cNvPicPr>
+          <p:nvPr/>
+        </p:nvPicPr>
+        <p:blipFill>
+          <a:blip r:embed="rId2"/>
+          <a:stretch>
+            <a:fillRect/>
+          </a:stretch>
+        </p:blipFill>
+        <p:spPr>
+          <a:xfrm>
+            <a:off x="1217792" y="0"/>
+            <a:ext cx="9756416" cy="6858000"/>
+          </a:xfrm>
+          <a:prstGeom prst="rect">
+            <a:avLst/>
+          </a:prstGeom>
+        </p:spPr>
+      </p:pic>
+    </p:spTree>
+    <p:extLst>
+      <p:ext uri="{BB962C8B-B14F-4D97-AF65-F5344CB8AC3E}">
+        <p14:creationId xmlns:p14="http://schemas.microsoft.com/office/powerpoint/2010/main" val="701625787"/>
       </p:ext>
     </p:extLst>
   </p:cSld>
